--- a/library/seminars/sem-06/rendered/sem-06-n43.pptx
+++ b/library/seminars/sem-06/rendered/sem-06-n43.pptx
@@ -502,37 +502,43 @@
           <a:lstStyle/>
           <a:p>
             <a:r>
-              <a:t>Делегировать чтение имеет смысл, когда из десятков файлов нужно вынести короткий вывод: факт, да или нет, список в несколько строк. Если работа продолжается на том же материале — рефакторинг, который трогает те же сорок файлов, — читать их придётся в любом случае, и делать это в своём окне тогда входит в саму работу: дальше с содержимым работать вам, а роль прочитала и исчезла.</a:t>
+              <a:t>Делегировать чтение имеет смысл, когда из десятков файлов нужно вынести короткий вывод: список мест в несколько строк, по которому дальше и работают. Сорок файлов поиска и четыре файла правки — ровно этот случай.</a:t>
             </a:r>
           </a:p>
           <a:p/>
           <a:p>
             <a:r>
-              <a:t>Что мы заводим ради контекста — решаем по тому, что останется в окне после ответа, и не по тому, сколько файлов пришлось открыть. Интуиция говорила: отдельный исполнитель прочитает быстрее. Проверка показала: сорок файлов остаются сорока файлами и тем же временем, меняется только чьё окно их держит.</a:t>
+              <a:t>Если дальше работать придётся со всем прочитанным объёмом — рефакторинг, который трогает те же сорок файлов, — читать их придётся в любом случае, и делать это в своём контексте тогда входит в саму работу: дальше с содержимым работать вам.</a:t>
             </a:r>
           </a:p>
           <a:p/>
           <a:p>
             <a:r>
-              <a:t>И к себе. Назовите про себя вопрос из своего проекта, ответ на который — одна строка, а чтения под него — полрепозитория. Назвали — вот первый кандидат на делегирование. А если после ответа вы продолжаете работать в тех же файлах, кандидат не он.</a:t>
+              <a:t>Что мы заводим ради контекста — решаем по тому, что останется в контексте после ответа, и не по тому, сколько файлов пришлось открыть. Интуиция говорила: отдельный исполнитель прочитает быстрее. Проверка показала: сорок файлов остаются сорока файлами и тем же временем, а меняются двое — чей контекст их держит и куда сам возвращается итог.</a:t>
             </a:r>
           </a:p>
           <a:p/>
           <a:p>
             <a:r>
-              <a:t>Если спросят про границу из прошлого слайда: тот же принцип применяется и к ней. Подключили роли лишние серверы — из её окна в родительское всё равно вернётся только итог, но само окно роли будет занято раньше и сильнее, чем нужно. Экономия контекста считается с этой оговоркой. Критерий она оставляет в силе и уточняет только размер самой экономии.</a:t>
+              <a:t>И к себе. Назовите про себя место в своём проекте, где перед правкой приходится искать по десяткам файлов, а находятся три-четыре строки. Назвали — вот первый кандидат на делегирование. А если править вы будете все эти же десятки файлов, кандидат не он.</a:t>
             </a:r>
           </a:p>
           <a:p/>
           <a:p>
             <a:r>
-              <a:t>Если спросят, где проходит граница между «коротким выводом» и «продолжением работы»: по тому, нужен ли вам дальше сам материал. Ответ на вопрос технического директора был нужен один раз — содержимое сорока файлов для него не пригодилось бы больше никогда. Правка в тех же файлах — другое дело: там содержимое и есть предмет работы.</a:t>
+              <a:t>Если спросят про границу из прошлого слайда: тот же принцип применяется и к ней. Подключили роли лишние серверы — обратно всё равно вернётся только итог, но контекст роли будет занят раньше и сильнее, чем нужно. Экономия считается с этой оговоркой; критерий она оставляет в силе и уточняет только размер самой экономии.</a:t>
             </a:r>
           </a:p>
           <a:p/>
           <a:p>
             <a:r>
-              <a:t>Если спросят, можно ли попросить роль вернуть пересказ прочитанного вместо вывода: технически можно, и экономия на этом кончается. Роль, которой велели пересказать сорок файлов, вернёт в ваше окно те же сорок файлов, только своими словами. Формат ответа роли — часть критерия, не деталь оформления.</a:t>
+              <a:t>Если спросят, где именно проходит граница между «коротким выводом» и «работой со всем объёмом»: по тому, нужен ли вам дальше весь материал или адреса внутри него. Герою понадобились четыре места из сорока файлов; содержимое остальных тридцати шести не пригодилось бы ему больше никогда. Рефакторинг тех же сорока — другое дело: там содержимое и есть предмет работы.</a:t>
+            </a:r>
+          </a:p>
+          <a:p/>
+          <a:p>
+            <a:r>
+              <a:t>Если спросят, можно ли попросить роль вернуть пересказ прочитанного вместо вывода: технически можно, и экономия на этом кончается. Роль, которой велели пересказать сорок файлов, вернёт в ваш контекст те же сорок файлов, только своими словами. Формат ответа роли — часть критерия, не деталь оформления. Ровно та же арифметика, что со второй сессией: чем длиннее то, что возвращается, тем меньше смысла было уносить чтение.</a:t>
             </a:r>
           </a:p>
           <a:p/>
@@ -3589,7 +3595,7 @@
                 </a:solidFill>
                 <a:latin typeface="Arial"/>
               </a:rPr>
-              <a:t>Что остаётся в окне после ответа</a:t>
+              <a:t>Что остаётся в контексте после ответа</a:t>
             </a:r>
           </a:p>
         </p:txBody>
@@ -3602,7 +3608,7 @@
         </p:nvSpPr>
         <p:spPr>
           <a:xfrm>
-            <a:off x="502920" y="1086002"/>
+            <a:off x="502920" y="1059027"/>
             <a:ext cx="82296" cy="1219200"/>
           </a:xfrm>
           <a:prstGeom prst="roundRect">
@@ -3648,7 +3654,7 @@
         </p:nvSpPr>
         <p:spPr>
           <a:xfrm>
-            <a:off x="859536" y="1214018"/>
+            <a:off x="859536" y="1187043"/>
             <a:ext cx="10643616" cy="963168"/>
           </a:xfrm>
           <a:prstGeom prst="rect">
@@ -3677,7 +3683,7 @@
                 </a:solidFill>
                 <a:latin typeface="Arial"/>
               </a:rPr>
-              <a:t>Что мы заводим ради контекста — решаем по тому, что останется в окне после ответа, и не по тому, сколько файлов пришлось открыть. Интуиция говорила: отдельный исполнитель прочитает быстрее. Проверка показала: сорок файлов остаются сорока файлами и тем же временем, меняется только то, чьё окно их держит.</a:t>
+              <a:t>Что мы заводим ради контекста — решаем по тому, что останется в контексте после ответа, и не по тому, сколько файлов пришлось открыть. Интуиция говорила: отдельный исполнитель прочитает быстрее. Проверка показала: сорок файлов остаются сорока файлами и тем же временем, а меняются двое — чей контекст их держит и куда сам возвращается итог.</a:t>
             </a:r>
           </a:p>
         </p:txBody>
@@ -3690,12 +3696,12 @@
         </p:nvSpPr>
         <p:spPr>
           <a:xfrm>
-            <a:off x="502920" y="2826410"/>
-            <a:ext cx="11183112" cy="1706499"/>
+            <a:off x="502920" y="2731998"/>
+            <a:ext cx="11183112" cy="1908810"/>
           </a:xfrm>
           <a:prstGeom prst="roundRect">
             <a:avLst>
-              <a:gd name="adj" fmla="val 17861"/>
+              <a:gd name="adj" fmla="val 15968"/>
             </a:avLst>
           </a:prstGeom>
           <a:solidFill>
@@ -3738,7 +3744,7 @@
         </p:nvSpPr>
         <p:spPr>
           <a:xfrm>
-            <a:off x="758952" y="3261893"/>
+            <a:off x="758952" y="3268637"/>
             <a:ext cx="100584" cy="100584"/>
           </a:xfrm>
           <a:prstGeom prst="roundRect">
@@ -3784,8 +3790,8 @@
         </p:nvSpPr>
         <p:spPr>
           <a:xfrm>
-            <a:off x="1106424" y="3045866"/>
-            <a:ext cx="10360152" cy="532638"/>
+            <a:off x="1106424" y="2951454"/>
+            <a:ext cx="10360152" cy="734949"/>
           </a:xfrm>
           <a:prstGeom prst="rect">
             <a:avLst/>
@@ -3813,7 +3819,7 @@
                 </a:solidFill>
                 <a:latin typeface="Arial"/>
               </a:rPr>
-              <a:t>Делегировать чтение имеет смысл, когда то, что нужно вынести из десятков файлов, — короткий вывод: факт, да/нет, список в несколько строк.</a:t>
+              <a:t>Делегировать чтение имеет смысл, когда из десятков файлов нужно вынести короткий вывод: факт, да/нет, список мест в несколько строк, по которому дальше и работают. Сорок файлов поиска, четыре файла правки — ровно этот случай.</a:t>
             </a:r>
           </a:p>
         </p:txBody>
@@ -3826,7 +3832,7 @@
         </p:nvSpPr>
         <p:spPr>
           <a:xfrm>
-            <a:off x="758952" y="3895686"/>
+            <a:off x="758952" y="4003586"/>
             <a:ext cx="100584" cy="100584"/>
           </a:xfrm>
           <a:prstGeom prst="roundRect">
@@ -3872,7 +3878,7 @@
         </p:nvSpPr>
         <p:spPr>
           <a:xfrm>
-            <a:off x="1106424" y="3578504"/>
+            <a:off x="1106424" y="3686403"/>
             <a:ext cx="10360152" cy="734949"/>
           </a:xfrm>
           <a:prstGeom prst="rect">
@@ -3901,7 +3907,7 @@
                 </a:solidFill>
                 <a:latin typeface="Arial"/>
               </a:rPr>
-              <a:t>Если работа продолжается на том же материале — например, рефакторинг тех же сорока файлов, — читать их придётся в любом случае; делать это в своём окне тогда входит в саму работу: дальше с этим содержимым нужно будет работать самому.</a:t>
+              <a:t>Если дальше работать придётся со всем прочитанным объёмом — рефакторинг тех же сорока файлов, — читать их придётся в любом случае; делать это в своём контексте тогда входит в саму работу, потому что с этим содержимым дальше работать вам.</a:t>
             </a:r>
           </a:p>
         </p:txBody>
@@ -3914,7 +3920,7 @@
         </p:nvSpPr>
         <p:spPr>
           <a:xfrm>
-            <a:off x="502920" y="5054117"/>
+            <a:off x="502920" y="5094579"/>
             <a:ext cx="11183112" cy="1059561"/>
           </a:xfrm>
           <a:prstGeom prst="roundRect">
@@ -3962,7 +3968,7 @@
         </p:nvSpPr>
         <p:spPr>
           <a:xfrm>
-            <a:off x="722376" y="5182133"/>
+            <a:off x="722376" y="5222595"/>
             <a:ext cx="10634472" cy="803528"/>
           </a:xfrm>
           <a:prstGeom prst="rect">
@@ -4000,7 +4006,7 @@
                 </a:solidFill>
                 <a:latin typeface="Arial"/>
               </a:rPr>
-              <a:t> Назовите про себя вопрос из своего проекта, ответ на который — одна строка, а чтения под него — полрепозитория. Назвали — вот первый кандидат на делегирование. Если после ответа вы продолжаете работать в тех же файлах, кандидат не он.</a:t>
+              <a:t> Назовите про себя место в своём проекте, где перед правкой приходится искать по десяткам файлов, а находятся три-четыре строки. Назвали — вот первый кандидат на делегирование. Если править вы будете все эти же десятки файлов, кандидат не он.</a:t>
             </a:r>
           </a:p>
         </p:txBody>
@@ -4042,7 +4048,7 @@
                 </a:solidFill>
                 <a:latin typeface="Arial"/>
               </a:rPr>
-              <a:t>43</a:t>
+              <a:t>44</a:t>
             </a:r>
           </a:p>
         </p:txBody>
